--- a/class/cloud_infra_mgmt/04주차_Kubernetes개념/01_강의자료/2차시_Pod개념과실습.pptx
+++ b/class/cloud_infra_mgmt/04주차_Kubernetes개념/01_강의자료/2차시_Pod개념과실습.pptx
@@ -5096,7 +5096,7 @@
           <a:p>
             <a:pPr>
               <a:lnSpc>
-                <a:spcPct val="115000"/>
+                <a:spcPct val="149500"/>
               </a:lnSpc>
             </a:pPr>
             <a:r>
@@ -5121,7 +5121,7 @@
           <a:p>
             <a:pPr>
               <a:lnSpc>
-                <a:spcPct val="115000"/>
+                <a:spcPct val="149500"/>
               </a:lnSpc>
             </a:pPr>
             <a:r>
@@ -5146,7 +5146,7 @@
           <a:p>
             <a:pPr>
               <a:lnSpc>
-                <a:spcPct val="115000"/>
+                <a:spcPct val="149500"/>
               </a:lnSpc>
             </a:pPr>
             <a:r>
@@ -5171,7 +5171,7 @@
           <a:p>
             <a:pPr>
               <a:lnSpc>
-                <a:spcPct val="115000"/>
+                <a:spcPct val="149500"/>
               </a:lnSpc>
             </a:pPr>
             <a:r>
@@ -6420,16 +6420,104 @@
       </p:sp>
       <p:sp>
         <p:nvSpPr>
-          <p:cNvPr id="7" name="Isosceles Triangle 6"/>
+          <p:cNvPr id="7" name="Rectangle 6"/>
           <p:cNvSpPr/>
           <p:nvPr/>
         </p:nvSpPr>
         <p:spPr>
-          <a:xfrm rot="5400000">
-            <a:off x="3495751" y="1673352"/>
-            <a:ext cx="146304" cy="146304"/>
-          </a:xfrm>
-          <a:prstGeom prst="triangle">
+          <a:xfrm>
+            <a:off x="5096865" y="1730959"/>
+            <a:ext cx="1995220" cy="31089"/>
+          </a:xfrm>
+          <a:prstGeom prst="rect">
+            <a:avLst/>
+          </a:prstGeom>
+          <a:solidFill>
+            <a:srgbClr val="14B8A6"/>
+          </a:solidFill>
+          <a:ln>
+            <a:noFill/>
+          </a:ln>
+          <a:effectLst/>
+        </p:spPr>
+        <p:style>
+          <a:lnRef idx="1">
+            <a:schemeClr val="accent1"/>
+          </a:lnRef>
+          <a:fillRef idx="3">
+            <a:schemeClr val="accent1"/>
+          </a:fillRef>
+          <a:effectRef idx="2">
+            <a:schemeClr val="accent1"/>
+          </a:effectRef>
+          <a:fontRef idx="minor">
+            <a:schemeClr val="lt1"/>
+          </a:fontRef>
+        </p:style>
+        <p:txBody>
+          <a:bodyPr rtlCol="0" anchor="ctr"/>
+          <a:lstStyle/>
+          <a:p>
+            <a:pPr algn="ctr"/>
+          </a:p>
+        </p:txBody>
+      </p:sp>
+      <p:sp>
+        <p:nvSpPr>
+          <p:cNvPr id="8" name="Rectangle 7"/>
+          <p:cNvSpPr/>
+          <p:nvPr/>
+        </p:nvSpPr>
+        <p:spPr>
+          <a:xfrm>
+            <a:off x="7622438" y="1730959"/>
+            <a:ext cx="1995220" cy="31089"/>
+          </a:xfrm>
+          <a:prstGeom prst="rect">
+            <a:avLst/>
+          </a:prstGeom>
+          <a:solidFill>
+            <a:srgbClr val="14B8A6"/>
+          </a:solidFill>
+          <a:ln>
+            <a:noFill/>
+          </a:ln>
+          <a:effectLst/>
+        </p:spPr>
+        <p:style>
+          <a:lnRef idx="1">
+            <a:schemeClr val="accent1"/>
+          </a:lnRef>
+          <a:fillRef idx="3">
+            <a:schemeClr val="accent1"/>
+          </a:fillRef>
+          <a:effectRef idx="2">
+            <a:schemeClr val="accent1"/>
+          </a:effectRef>
+          <a:fontRef idx="minor">
+            <a:schemeClr val="lt1"/>
+          </a:fontRef>
+        </p:style>
+        <p:txBody>
+          <a:bodyPr rtlCol="0" anchor="ctr"/>
+          <a:lstStyle/>
+          <a:p>
+            <a:pPr algn="ctr"/>
+          </a:p>
+        </p:txBody>
+      </p:sp>
+      <p:sp>
+        <p:nvSpPr>
+          <p:cNvPr id="9" name="Oval 8"/>
+          <p:cNvSpPr/>
+          <p:nvPr/>
+        </p:nvSpPr>
+        <p:spPr>
+          <a:xfrm>
+            <a:off x="2040940" y="1481328"/>
+            <a:ext cx="530352" cy="530352"/>
+          </a:xfrm>
+          <a:prstGeom prst="ellipse">
             <a:avLst/>
           </a:prstGeom>
           <a:solidFill>
@@ -6464,227 +6552,7 @@
       </p:sp>
       <p:sp>
         <p:nvSpPr>
-          <p:cNvPr id="8" name="Rectangle 7"/>
-          <p:cNvSpPr/>
-          <p:nvPr/>
-        </p:nvSpPr>
-        <p:spPr>
-          <a:xfrm>
-            <a:off x="5096865" y="1730959"/>
-            <a:ext cx="1995220" cy="31089"/>
-          </a:xfrm>
-          <a:prstGeom prst="rect">
-            <a:avLst/>
-          </a:prstGeom>
-          <a:solidFill>
-            <a:srgbClr val="14B8A6"/>
-          </a:solidFill>
-          <a:ln>
-            <a:noFill/>
-          </a:ln>
-          <a:effectLst/>
-        </p:spPr>
-        <p:style>
-          <a:lnRef idx="1">
-            <a:schemeClr val="accent1"/>
-          </a:lnRef>
-          <a:fillRef idx="3">
-            <a:schemeClr val="accent1"/>
-          </a:fillRef>
-          <a:effectRef idx="2">
-            <a:schemeClr val="accent1"/>
-          </a:effectRef>
-          <a:fontRef idx="minor">
-            <a:schemeClr val="lt1"/>
-          </a:fontRef>
-        </p:style>
-        <p:txBody>
-          <a:bodyPr rtlCol="0" anchor="ctr"/>
-          <a:lstStyle/>
-          <a:p>
-            <a:pPr algn="ctr"/>
-          </a:p>
-        </p:txBody>
-      </p:sp>
-      <p:sp>
-        <p:nvSpPr>
-          <p:cNvPr id="9" name="Isosceles Triangle 8"/>
-          <p:cNvSpPr/>
-          <p:nvPr/>
-        </p:nvSpPr>
-        <p:spPr>
-          <a:xfrm rot="5400000">
-            <a:off x="6021324" y="1673352"/>
-            <a:ext cx="146304" cy="146304"/>
-          </a:xfrm>
-          <a:prstGeom prst="triangle">
-            <a:avLst/>
-          </a:prstGeom>
-          <a:solidFill>
-            <a:srgbClr val="0D9488"/>
-          </a:solidFill>
-          <a:ln>
-            <a:noFill/>
-          </a:ln>
-          <a:effectLst/>
-        </p:spPr>
-        <p:style>
-          <a:lnRef idx="1">
-            <a:schemeClr val="accent1"/>
-          </a:lnRef>
-          <a:fillRef idx="3">
-            <a:schemeClr val="accent1"/>
-          </a:fillRef>
-          <a:effectRef idx="2">
-            <a:schemeClr val="accent1"/>
-          </a:effectRef>
-          <a:fontRef idx="minor">
-            <a:schemeClr val="lt1"/>
-          </a:fontRef>
-        </p:style>
-        <p:txBody>
-          <a:bodyPr rtlCol="0" anchor="ctr"/>
-          <a:lstStyle/>
-          <a:p>
-            <a:pPr algn="ctr"/>
-          </a:p>
-        </p:txBody>
-      </p:sp>
-      <p:sp>
-        <p:nvSpPr>
-          <p:cNvPr id="10" name="Rectangle 9"/>
-          <p:cNvSpPr/>
-          <p:nvPr/>
-        </p:nvSpPr>
-        <p:spPr>
-          <a:xfrm>
-            <a:off x="7622438" y="1730959"/>
-            <a:ext cx="1995220" cy="31089"/>
-          </a:xfrm>
-          <a:prstGeom prst="rect">
-            <a:avLst/>
-          </a:prstGeom>
-          <a:solidFill>
-            <a:srgbClr val="14B8A6"/>
-          </a:solidFill>
-          <a:ln>
-            <a:noFill/>
-          </a:ln>
-          <a:effectLst/>
-        </p:spPr>
-        <p:style>
-          <a:lnRef idx="1">
-            <a:schemeClr val="accent1"/>
-          </a:lnRef>
-          <a:fillRef idx="3">
-            <a:schemeClr val="accent1"/>
-          </a:fillRef>
-          <a:effectRef idx="2">
-            <a:schemeClr val="accent1"/>
-          </a:effectRef>
-          <a:fontRef idx="minor">
-            <a:schemeClr val="lt1"/>
-          </a:fontRef>
-        </p:style>
-        <p:txBody>
-          <a:bodyPr rtlCol="0" anchor="ctr"/>
-          <a:lstStyle/>
-          <a:p>
-            <a:pPr algn="ctr"/>
-          </a:p>
-        </p:txBody>
-      </p:sp>
-      <p:sp>
-        <p:nvSpPr>
-          <p:cNvPr id="11" name="Isosceles Triangle 10"/>
-          <p:cNvSpPr/>
-          <p:nvPr/>
-        </p:nvSpPr>
-        <p:spPr>
-          <a:xfrm rot="5400000">
-            <a:off x="8546896" y="1673352"/>
-            <a:ext cx="146304" cy="146304"/>
-          </a:xfrm>
-          <a:prstGeom prst="triangle">
-            <a:avLst/>
-          </a:prstGeom>
-          <a:solidFill>
-            <a:srgbClr val="0D9488"/>
-          </a:solidFill>
-          <a:ln>
-            <a:noFill/>
-          </a:ln>
-          <a:effectLst/>
-        </p:spPr>
-        <p:style>
-          <a:lnRef idx="1">
-            <a:schemeClr val="accent1"/>
-          </a:lnRef>
-          <a:fillRef idx="3">
-            <a:schemeClr val="accent1"/>
-          </a:fillRef>
-          <a:effectRef idx="2">
-            <a:schemeClr val="accent1"/>
-          </a:effectRef>
-          <a:fontRef idx="minor">
-            <a:schemeClr val="lt1"/>
-          </a:fontRef>
-        </p:style>
-        <p:txBody>
-          <a:bodyPr rtlCol="0" anchor="ctr"/>
-          <a:lstStyle/>
-          <a:p>
-            <a:pPr algn="ctr"/>
-          </a:p>
-        </p:txBody>
-      </p:sp>
-      <p:sp>
-        <p:nvSpPr>
-          <p:cNvPr id="12" name="Oval 11"/>
-          <p:cNvSpPr/>
-          <p:nvPr/>
-        </p:nvSpPr>
-        <p:spPr>
-          <a:xfrm>
-            <a:off x="2040940" y="1481328"/>
-            <a:ext cx="530352" cy="530352"/>
-          </a:xfrm>
-          <a:prstGeom prst="ellipse">
-            <a:avLst/>
-          </a:prstGeom>
-          <a:solidFill>
-            <a:srgbClr val="0D9488"/>
-          </a:solidFill>
-          <a:ln>
-            <a:noFill/>
-          </a:ln>
-          <a:effectLst/>
-        </p:spPr>
-        <p:style>
-          <a:lnRef idx="1">
-            <a:schemeClr val="accent1"/>
-          </a:lnRef>
-          <a:fillRef idx="3">
-            <a:schemeClr val="accent1"/>
-          </a:fillRef>
-          <a:effectRef idx="2">
-            <a:schemeClr val="accent1"/>
-          </a:effectRef>
-          <a:fontRef idx="minor">
-            <a:schemeClr val="lt1"/>
-          </a:fontRef>
-        </p:style>
-        <p:txBody>
-          <a:bodyPr rtlCol="0" anchor="ctr"/>
-          <a:lstStyle/>
-          <a:p>
-            <a:pPr algn="ctr"/>
-          </a:p>
-        </p:txBody>
-      </p:sp>
-      <p:sp>
-        <p:nvSpPr>
-          <p:cNvPr id="13" name="TextBox 12"/>
+          <p:cNvPr id="10" name="TextBox 9"/>
           <p:cNvSpPr txBox="1"/>
           <p:nvPr/>
         </p:nvSpPr>
@@ -6719,7 +6587,7 @@
       </p:sp>
       <p:sp>
         <p:nvSpPr>
-          <p:cNvPr id="14" name="Rounded Rectangle 13"/>
+          <p:cNvPr id="11" name="Rounded Rectangle 10"/>
           <p:cNvSpPr/>
           <p:nvPr/>
         </p:nvSpPr>
@@ -6767,7 +6635,7 @@
       </p:sp>
       <p:sp>
         <p:nvSpPr>
-          <p:cNvPr id="15" name="TextBox 14"/>
+          <p:cNvPr id="12" name="TextBox 11"/>
           <p:cNvSpPr txBox="1"/>
           <p:nvPr/>
         </p:nvSpPr>
@@ -6802,7 +6670,7 @@
       </p:sp>
       <p:sp>
         <p:nvSpPr>
-          <p:cNvPr id="16" name="TextBox 15"/>
+          <p:cNvPr id="13" name="TextBox 12"/>
           <p:cNvSpPr txBox="1"/>
           <p:nvPr/>
         </p:nvSpPr>
@@ -6841,7 +6709,7 @@
       </p:sp>
       <p:sp>
         <p:nvSpPr>
-          <p:cNvPr id="17" name="Oval 16"/>
+          <p:cNvPr id="14" name="Oval 13"/>
           <p:cNvSpPr/>
           <p:nvPr/>
         </p:nvSpPr>
@@ -6885,7 +6753,7 @@
       </p:sp>
       <p:sp>
         <p:nvSpPr>
-          <p:cNvPr id="18" name="TextBox 17"/>
+          <p:cNvPr id="15" name="TextBox 14"/>
           <p:cNvSpPr txBox="1"/>
           <p:nvPr/>
         </p:nvSpPr>
@@ -6920,7 +6788,7 @@
       </p:sp>
       <p:sp>
         <p:nvSpPr>
-          <p:cNvPr id="19" name="Rounded Rectangle 18"/>
+          <p:cNvPr id="16" name="Rounded Rectangle 15"/>
           <p:cNvSpPr/>
           <p:nvPr/>
         </p:nvSpPr>
@@ -6968,7 +6836,7 @@
       </p:sp>
       <p:sp>
         <p:nvSpPr>
-          <p:cNvPr id="20" name="TextBox 19"/>
+          <p:cNvPr id="17" name="TextBox 16"/>
           <p:cNvSpPr txBox="1"/>
           <p:nvPr/>
         </p:nvSpPr>
@@ -7003,7 +6871,7 @@
       </p:sp>
       <p:sp>
         <p:nvSpPr>
-          <p:cNvPr id="21" name="TextBox 20"/>
+          <p:cNvPr id="18" name="TextBox 17"/>
           <p:cNvSpPr txBox="1"/>
           <p:nvPr/>
         </p:nvSpPr>
@@ -7042,7 +6910,7 @@
       </p:sp>
       <p:sp>
         <p:nvSpPr>
-          <p:cNvPr id="22" name="Oval 21"/>
+          <p:cNvPr id="19" name="Oval 18"/>
           <p:cNvSpPr/>
           <p:nvPr/>
         </p:nvSpPr>
@@ -7086,7 +6954,7 @@
       </p:sp>
       <p:sp>
         <p:nvSpPr>
-          <p:cNvPr id="23" name="TextBox 22"/>
+          <p:cNvPr id="20" name="TextBox 19"/>
           <p:cNvSpPr txBox="1"/>
           <p:nvPr/>
         </p:nvSpPr>
@@ -7121,7 +6989,7 @@
       </p:sp>
       <p:sp>
         <p:nvSpPr>
-          <p:cNvPr id="24" name="Rounded Rectangle 23"/>
+          <p:cNvPr id="21" name="Rounded Rectangle 20"/>
           <p:cNvSpPr/>
           <p:nvPr/>
         </p:nvSpPr>
@@ -7169,7 +7037,7 @@
       </p:sp>
       <p:sp>
         <p:nvSpPr>
-          <p:cNvPr id="25" name="TextBox 24"/>
+          <p:cNvPr id="22" name="TextBox 21"/>
           <p:cNvSpPr txBox="1"/>
           <p:nvPr/>
         </p:nvSpPr>
@@ -7204,7 +7072,7 @@
       </p:sp>
       <p:sp>
         <p:nvSpPr>
-          <p:cNvPr id="26" name="TextBox 25"/>
+          <p:cNvPr id="23" name="TextBox 22"/>
           <p:cNvSpPr txBox="1"/>
           <p:nvPr/>
         </p:nvSpPr>
@@ -7243,7 +7111,7 @@
       </p:sp>
       <p:sp>
         <p:nvSpPr>
-          <p:cNvPr id="27" name="Oval 26"/>
+          <p:cNvPr id="24" name="Oval 23"/>
           <p:cNvSpPr/>
           <p:nvPr/>
         </p:nvSpPr>
@@ -7287,7 +7155,7 @@
       </p:sp>
       <p:sp>
         <p:nvSpPr>
-          <p:cNvPr id="28" name="TextBox 27"/>
+          <p:cNvPr id="25" name="TextBox 24"/>
           <p:cNvSpPr txBox="1"/>
           <p:nvPr/>
         </p:nvSpPr>
@@ -7322,7 +7190,7 @@
       </p:sp>
       <p:sp>
         <p:nvSpPr>
-          <p:cNvPr id="29" name="Rounded Rectangle 28"/>
+          <p:cNvPr id="26" name="Rounded Rectangle 25"/>
           <p:cNvSpPr/>
           <p:nvPr/>
         </p:nvSpPr>
@@ -7370,7 +7238,7 @@
       </p:sp>
       <p:sp>
         <p:nvSpPr>
-          <p:cNvPr id="30" name="TextBox 29"/>
+          <p:cNvPr id="27" name="TextBox 26"/>
           <p:cNvSpPr txBox="1"/>
           <p:nvPr/>
         </p:nvSpPr>
@@ -7405,7 +7273,7 @@
       </p:sp>
       <p:sp>
         <p:nvSpPr>
-          <p:cNvPr id="31" name="TextBox 30"/>
+          <p:cNvPr id="28" name="TextBox 27"/>
           <p:cNvSpPr txBox="1"/>
           <p:nvPr/>
         </p:nvSpPr>
@@ -7444,7 +7312,7 @@
       </p:sp>
       <p:sp>
         <p:nvSpPr>
-          <p:cNvPr id="32" name="TextBox 31"/>
+          <p:cNvPr id="29" name="TextBox 28"/>
           <p:cNvSpPr txBox="1"/>
           <p:nvPr/>
         </p:nvSpPr>
@@ -7479,7 +7347,7 @@
       </p:sp>
       <p:sp>
         <p:nvSpPr>
-          <p:cNvPr id="33" name="TextBox 32"/>
+          <p:cNvPr id="30" name="TextBox 29"/>
           <p:cNvSpPr txBox="1"/>
           <p:nvPr/>
         </p:nvSpPr>
@@ -7514,7 +7382,7 @@
       </p:sp>
       <p:sp>
         <p:nvSpPr>
-          <p:cNvPr id="34" name="Rectangle 33"/>
+          <p:cNvPr id="31" name="Rectangle 30"/>
           <p:cNvSpPr/>
           <p:nvPr/>
         </p:nvSpPr>
@@ -8038,7 +7906,7 @@
           <a:p>
             <a:pPr>
               <a:lnSpc>
-                <a:spcPct val="115000"/>
+                <a:spcPct val="149500"/>
               </a:lnSpc>
             </a:pPr>
             <a:r>
@@ -8063,7 +7931,7 @@
           <a:p>
             <a:pPr>
               <a:lnSpc>
-                <a:spcPct val="115000"/>
+                <a:spcPct val="149500"/>
               </a:lnSpc>
             </a:pPr>
             <a:r>
@@ -8088,7 +7956,7 @@
           <a:p>
             <a:pPr>
               <a:lnSpc>
-                <a:spcPct val="115000"/>
+                <a:spcPct val="149500"/>
               </a:lnSpc>
             </a:pPr>
             <a:r>
@@ -10113,7 +9981,7 @@
           <a:p>
             <a:pPr>
               <a:lnSpc>
-                <a:spcPct val="115000"/>
+                <a:spcPct val="149500"/>
               </a:lnSpc>
             </a:pPr>
             <a:r>
@@ -10138,7 +10006,7 @@
           <a:p>
             <a:pPr>
               <a:lnSpc>
-                <a:spcPct val="115000"/>
+                <a:spcPct val="149500"/>
               </a:lnSpc>
             </a:pPr>
             <a:r>
@@ -10163,7 +10031,7 @@
           <a:p>
             <a:pPr>
               <a:lnSpc>
-                <a:spcPct val="115000"/>
+                <a:spcPct val="149500"/>
               </a:lnSpc>
             </a:pPr>
             <a:r>
@@ -10188,7 +10056,7 @@
           <a:p>
             <a:pPr>
               <a:lnSpc>
-                <a:spcPct val="115000"/>
+                <a:spcPct val="149500"/>
               </a:lnSpc>
             </a:pPr>
             <a:r>
@@ -10213,7 +10081,7 @@
           <a:p>
             <a:pPr>
               <a:lnSpc>
-                <a:spcPct val="115000"/>
+                <a:spcPct val="149500"/>
               </a:lnSpc>
             </a:pPr>
             <a:r>
@@ -10604,7 +10472,7 @@
           <a:p>
             <a:pPr>
               <a:lnSpc>
-                <a:spcPct val="115000"/>
+                <a:spcPct val="149500"/>
               </a:lnSpc>
             </a:pPr>
             <a:r>
@@ -10629,7 +10497,7 @@
           <a:p>
             <a:pPr>
               <a:lnSpc>
-                <a:spcPct val="115000"/>
+                <a:spcPct val="149500"/>
               </a:lnSpc>
             </a:pPr>
             <a:r>
@@ -10654,7 +10522,7 @@
           <a:p>
             <a:pPr>
               <a:lnSpc>
-                <a:spcPct val="115000"/>
+                <a:spcPct val="149500"/>
               </a:lnSpc>
             </a:pPr>
             <a:r>
@@ -10679,7 +10547,7 @@
           <a:p>
             <a:pPr>
               <a:lnSpc>
-                <a:spcPct val="115000"/>
+                <a:spcPct val="149500"/>
               </a:lnSpc>
             </a:pPr>
             <a:r>

--- a/class/cloud_infra_mgmt/04주차_Kubernetes개념/01_강의자료/2차시_Pod개념과실습.pptx
+++ b/class/cloud_infra_mgmt/04주차_Kubernetes개념/01_강의자료/2차시_Pod개념과실습.pptx
@@ -4732,6 +4732,8 @@
                   <a:srgbClr val="14B8A6"/>
                 </a:solidFill>
                 <a:latin typeface="맑은 고딕"/>
+                <a:ea typeface="맑은 고딕"/>
+                <a:cs typeface="맑은 고딕"/>
               </a:rPr>
               <a:t>클라우드인프라관리  ·  4주차 2차시</a:t>
             </a:r>
@@ -4767,6 +4769,8 @@
                   <a:srgbClr val="FFFFFF"/>
                 </a:solidFill>
                 <a:latin typeface="맑은 고딕"/>
+                <a:ea typeface="맑은 고딕"/>
+                <a:cs typeface="맑은 고딕"/>
               </a:rPr>
               <a:t>Pod — K8s의 가장 작은 단위</a:t>
             </a:r>
@@ -4802,6 +4806,8 @@
                   <a:srgbClr val="C9D3E6"/>
                 </a:solidFill>
                 <a:latin typeface="맑은 고딕"/>
+                <a:ea typeface="맑은 고딕"/>
+                <a:cs typeface="맑은 고딕"/>
               </a:rPr>
               <a:t>컨테이너를 감싸는 Pod, 첫 실습</a:t>
             </a:r>
@@ -4837,6 +4843,8 @@
                   <a:srgbClr val="FFFFFF"/>
                 </a:solidFill>
                 <a:latin typeface="맑은 고딕"/>
+                <a:ea typeface="맑은 고딕"/>
+                <a:cs typeface="맑은 고딕"/>
               </a:rPr>
               <a:t>영남이공대학교 김지윤교수</a:t>
             </a:r>
@@ -4996,6 +5004,8 @@
                   <a:srgbClr val="14213D"/>
                 </a:solidFill>
                 <a:latin typeface="맑은 고딕"/>
+                <a:ea typeface="맑은 고딕"/>
+                <a:cs typeface="맑은 고딕"/>
               </a:rPr>
               <a:t>03</a:t>
             </a:r>
@@ -5031,6 +5041,8 @@
                   <a:srgbClr val="14B8A6"/>
                 </a:solidFill>
                 <a:latin typeface="맑은 고딕"/>
+                <a:ea typeface="맑은 고딕"/>
+                <a:cs typeface="맑은 고딕"/>
               </a:rPr>
               <a:t>실습 안내</a:t>
             </a:r>
@@ -5066,6 +5078,8 @@
                   <a:srgbClr val="FFFFFF"/>
                 </a:solidFill>
                 <a:latin typeface="맑은 고딕"/>
+                <a:ea typeface="맑은 고딕"/>
+                <a:cs typeface="맑은 고딕"/>
               </a:rPr>
               <a:t>VM 과제 — minikube에서 동일 실습</a:t>
             </a:r>
@@ -5105,6 +5119,8 @@
                   <a:srgbClr val="0D9488"/>
                 </a:solidFill>
                 <a:latin typeface="맑은 고딕"/>
+                <a:ea typeface="맑은 고딕"/>
+                <a:cs typeface="맑은 고딕"/>
               </a:rPr>
               <a:t>●  </a:t>
             </a:r>
@@ -5114,6 +5130,8 @@
                   <a:srgbClr val="222733"/>
                 </a:solidFill>
                 <a:latin typeface="맑은 고딕"/>
+                <a:ea typeface="맑은 고딕"/>
+                <a:cs typeface="맑은 고딕"/>
               </a:rPr>
               <a:t>minikube start (지난 시간 켜둔 상태면 생략 가능)</a:t>
             </a:r>
@@ -5130,6 +5148,8 @@
                   <a:srgbClr val="0D9488"/>
                 </a:solidFill>
                 <a:latin typeface="맑은 고딕"/>
+                <a:ea typeface="맑은 고딕"/>
+                <a:cs typeface="맑은 고딕"/>
               </a:rPr>
               <a:t>●  </a:t>
             </a:r>
@@ -5139,6 +5159,8 @@
                   <a:srgbClr val="222733"/>
                 </a:solidFill>
                 <a:latin typeface="맑은 고딕"/>
+                <a:ea typeface="맑은 고딕"/>
+                <a:cs typeface="맑은 고딕"/>
               </a:rPr>
               <a:t>kubectl run mypod --image=nginx</a:t>
             </a:r>
@@ -5155,6 +5177,8 @@
                   <a:srgbClr val="0D9488"/>
                 </a:solidFill>
                 <a:latin typeface="맑은 고딕"/>
+                <a:ea typeface="맑은 고딕"/>
+                <a:cs typeface="맑은 고딕"/>
               </a:rPr>
               <a:t>●  </a:t>
             </a:r>
@@ -5164,6 +5188,8 @@
                   <a:srgbClr val="222733"/>
                 </a:solidFill>
                 <a:latin typeface="맑은 고딕"/>
+                <a:ea typeface="맑은 고딕"/>
+                <a:cs typeface="맑은 고딕"/>
               </a:rPr>
               <a:t>kubectl get pods / kubectl describe pod mypod / kubectl logs mypod</a:t>
             </a:r>
@@ -5180,6 +5206,8 @@
                   <a:srgbClr val="0D9488"/>
                 </a:solidFill>
                 <a:latin typeface="맑은 고딕"/>
+                <a:ea typeface="맑은 고딕"/>
+                <a:cs typeface="맑은 고딕"/>
               </a:rPr>
               <a:t>●  </a:t>
             </a:r>
@@ -5189,6 +5217,8 @@
                   <a:srgbClr val="222733"/>
                 </a:solidFill>
                 <a:latin typeface="맑은 고딕"/>
+                <a:ea typeface="맑은 고딕"/>
+                <a:cs typeface="맑은 고딕"/>
               </a:rPr>
               <a:t>실행 결과 캡처 후 LMS 제출</a:t>
             </a:r>
@@ -5224,6 +5254,8 @@
                   <a:srgbClr val="5B6373"/>
                 </a:solidFill>
                 <a:latin typeface="맑은 고딕"/>
+                <a:ea typeface="맑은 고딕"/>
+                <a:cs typeface="맑은 고딕"/>
               </a:rPr>
               <a:t>클라우드인프라관리  ·  4주차 2차시</a:t>
             </a:r>
@@ -5259,6 +5291,8 @@
                   <a:srgbClr val="5B6373"/>
                 </a:solidFill>
                 <a:latin typeface="맑은 고딕"/>
+                <a:ea typeface="맑은 고딕"/>
+                <a:cs typeface="맑은 고딕"/>
               </a:rPr>
               <a:t>10 / 12</a:t>
             </a:r>
@@ -5444,6 +5478,8 @@
                   <a:srgbClr val="FFFFFF"/>
                 </a:solidFill>
                 <a:latin typeface="맑은 고딕"/>
+                <a:ea typeface="맑은 고딕"/>
+                <a:cs typeface="맑은 고딕"/>
               </a:rPr>
               <a:t>오늘의 정리</a:t>
             </a:r>
@@ -5497,6 +5533,8 @@
                   <a:srgbClr val="14213D"/>
                 </a:solidFill>
                 <a:latin typeface="맑은 고딕"/>
+                <a:ea typeface="맑은 고딕"/>
+                <a:cs typeface="맑은 고딕"/>
               </a:rPr>
               <a:t>1</a:t>
             </a:r>
@@ -5532,6 +5570,8 @@
                   <a:srgbClr val="FFFFFF"/>
                 </a:solidFill>
                 <a:latin typeface="맑은 고딕"/>
+                <a:ea typeface="맑은 고딕"/>
+                <a:cs typeface="맑은 고딕"/>
               </a:rPr>
               <a:t>Pod = K8s가 다루는 가장 작은 배포 단위, 컨테이너를 감싼 것</a:t>
             </a:r>
@@ -5585,6 +5625,8 @@
                   <a:srgbClr val="14213D"/>
                 </a:solidFill>
                 <a:latin typeface="맑은 고딕"/>
+                <a:ea typeface="맑은 고딕"/>
+                <a:cs typeface="맑은 고딕"/>
               </a:rPr>
               <a:t>2</a:t>
             </a:r>
@@ -5620,6 +5662,8 @@
                   <a:srgbClr val="FFFFFF"/>
                 </a:solidFill>
                 <a:latin typeface="맑은 고딕"/>
+                <a:ea typeface="맑은 고딕"/>
+                <a:cs typeface="맑은 고딕"/>
               </a:rPr>
               <a:t>kubectl run/get/describe/logs로 Pod를 실행하고 점검한다</a:t>
             </a:r>
@@ -5761,6 +5805,8 @@
                   <a:srgbClr val="FFFFFF"/>
                 </a:solidFill>
                 <a:latin typeface="맑은 고딕"/>
+                <a:ea typeface="맑은 고딕"/>
+                <a:cs typeface="맑은 고딕"/>
               </a:rPr>
               <a:t>다음 차시 예고</a:t>
             </a:r>
@@ -5796,6 +5842,8 @@
                   <a:srgbClr val="14B8A6"/>
                 </a:solidFill>
                 <a:latin typeface="맑은 고딕"/>
+                <a:ea typeface="맑은 고딕"/>
+                <a:cs typeface="맑은 고딕"/>
               </a:rPr>
               <a:t>다음 차시 예고 — 4주차 3차시</a:t>
             </a:r>
@@ -5831,6 +5879,8 @@
                   <a:srgbClr val="FFFFFF"/>
                 </a:solidFill>
                 <a:latin typeface="맑은 고딕"/>
+                <a:ea typeface="맑은 고딕"/>
+                <a:cs typeface="맑은 고딕"/>
               </a:rPr>
               <a:t>Pod를 직접 하나씩 만드는 대신, 원하는 개수를 자동으로 유지해주는 Deployment를 YAML로 작성하고 배포합니다.</a:t>
             </a:r>
@@ -5972,6 +6022,8 @@
                   <a:srgbClr val="14B8A6"/>
                 </a:solidFill>
                 <a:latin typeface="맑은 고딕"/>
+                <a:ea typeface="맑은 고딕"/>
+                <a:cs typeface="맑은 고딕"/>
               </a:rPr>
               <a:t>SESSION OVERVIEW</a:t>
             </a:r>
@@ -6007,6 +6059,8 @@
                   <a:srgbClr val="FFFFFF"/>
                 </a:solidFill>
                 <a:latin typeface="맑은 고딕"/>
+                <a:ea typeface="맑은 고딕"/>
+                <a:cs typeface="맑은 고딕"/>
               </a:rPr>
               <a:t>오늘의 학습 목표</a:t>
             </a:r>
@@ -6046,6 +6100,8 @@
                   <a:srgbClr val="222733"/>
                 </a:solidFill>
                 <a:latin typeface="맑은 고딕"/>
+                <a:ea typeface="맑은 고딕"/>
+                <a:cs typeface="맑은 고딕"/>
               </a:rPr>
               <a:t>1.  Pod가 무엇이고 왜 컨테이너를 직접 안 쓰고 Pod로 감싸는지 이해한다</a:t>
             </a:r>
@@ -6062,6 +6118,8 @@
                   <a:srgbClr val="222733"/>
                 </a:solidFill>
                 <a:latin typeface="맑은 고딕"/>
+                <a:ea typeface="맑은 고딕"/>
+                <a:cs typeface="맑은 고딕"/>
               </a:rPr>
               <a:t>2.  kubectl run으로 Pod를 실행하고 상태를 확인한다</a:t>
             </a:r>
@@ -6078,6 +6136,8 @@
                   <a:srgbClr val="222733"/>
                 </a:solidFill>
                 <a:latin typeface="맑은 고딕"/>
+                <a:ea typeface="맑은 고딕"/>
+                <a:cs typeface="맑은 고딕"/>
               </a:rPr>
               <a:t>3.  kubectl describe·logs로 Pod 상태를 점검한다</a:t>
             </a:r>
@@ -6113,6 +6173,8 @@
                   <a:srgbClr val="5B6373"/>
                 </a:solidFill>
                 <a:latin typeface="맑은 고딕"/>
+                <a:ea typeface="맑은 고딕"/>
+                <a:cs typeface="맑은 고딕"/>
               </a:rPr>
               <a:t>클라우드인프라관리  ·  4주차 2차시</a:t>
             </a:r>
@@ -6148,6 +6210,8 @@
                   <a:srgbClr val="5B6373"/>
                 </a:solidFill>
                 <a:latin typeface="맑은 고딕"/>
+                <a:ea typeface="맑은 고딕"/>
+                <a:cs typeface="맑은 고딕"/>
               </a:rPr>
               <a:t>02 / 12</a:t>
             </a:r>
@@ -6333,6 +6397,8 @@
                   <a:srgbClr val="14B8A6"/>
                 </a:solidFill>
                 <a:latin typeface="맑은 고딕"/>
+                <a:ea typeface="맑은 고딕"/>
+                <a:cs typeface="맑은 고딕"/>
               </a:rPr>
               <a:t>SESSION OVERVIEW</a:t>
             </a:r>
@@ -6368,6 +6434,8 @@
                   <a:srgbClr val="FFFFFF"/>
                 </a:solidFill>
                 <a:latin typeface="맑은 고딕"/>
+                <a:ea typeface="맑은 고딕"/>
+                <a:cs typeface="맑은 고딕"/>
               </a:rPr>
               <a:t>오늘의 진행 순서</a:t>
             </a:r>
@@ -6579,6 +6647,8 @@
                   <a:srgbClr val="FFFFFF"/>
                 </a:solidFill>
                 <a:latin typeface="맑은 고딕"/>
+                <a:ea typeface="맑은 고딕"/>
+                <a:cs typeface="맑은 고딕"/>
               </a:rPr>
               <a:t>1</a:t>
             </a:r>
@@ -6662,6 +6732,8 @@
                   <a:srgbClr val="14213D"/>
                 </a:solidFill>
                 <a:latin typeface="맑은 고딕"/>
+                <a:ea typeface="맑은 고딕"/>
+                <a:cs typeface="맑은 고딕"/>
               </a:rPr>
               <a:t>개념 설명</a:t>
             </a:r>
@@ -6701,6 +6773,8 @@
                   <a:srgbClr val="222733"/>
                 </a:solidFill>
                 <a:latin typeface="맑은 고딕"/>
+                <a:ea typeface="맑은 고딕"/>
+                <a:cs typeface="맑은 고딕"/>
               </a:rPr>
               <a:t>강의자료 기반 직접 강의</a:t>
             </a:r>
@@ -6780,6 +6854,8 @@
                   <a:srgbClr val="FFFFFF"/>
                 </a:solidFill>
                 <a:latin typeface="맑은 고딕"/>
+                <a:ea typeface="맑은 고딕"/>
+                <a:cs typeface="맑은 고딕"/>
               </a:rPr>
               <a:t>2</a:t>
             </a:r>
@@ -6863,6 +6939,8 @@
                   <a:srgbClr val="14213D"/>
                 </a:solidFill>
                 <a:latin typeface="맑은 고딕"/>
+                <a:ea typeface="맑은 고딕"/>
+                <a:cs typeface="맑은 고딕"/>
               </a:rPr>
               <a:t>Killercoda</a:t>
             </a:r>
@@ -6902,6 +6980,8 @@
                   <a:srgbClr val="222733"/>
                 </a:solidFill>
                 <a:latin typeface="맑은 고딕"/>
+                <a:ea typeface="맑은 고딕"/>
+                <a:cs typeface="맑은 고딕"/>
               </a:rPr>
               <a:t>Pod 실행·점검 실습</a:t>
             </a:r>
@@ -6981,6 +7061,8 @@
                   <a:srgbClr val="FFFFFF"/>
                 </a:solidFill>
                 <a:latin typeface="맑은 고딕"/>
+                <a:ea typeface="맑은 고딕"/>
+                <a:cs typeface="맑은 고딕"/>
               </a:rPr>
               <a:t>3</a:t>
             </a:r>
@@ -7064,6 +7146,8 @@
                   <a:srgbClr val="14213D"/>
                 </a:solidFill>
                 <a:latin typeface="맑은 고딕"/>
+                <a:ea typeface="맑은 고딕"/>
+                <a:cs typeface="맑은 고딕"/>
               </a:rPr>
               <a:t>VM 안내</a:t>
             </a:r>
@@ -7103,6 +7187,8 @@
                   <a:srgbClr val="222733"/>
                 </a:solidFill>
                 <a:latin typeface="맑은 고딕"/>
+                <a:ea typeface="맑은 고딕"/>
+                <a:cs typeface="맑은 고딕"/>
               </a:rPr>
               <a:t>minikube에서 Pod 실습</a:t>
             </a:r>
@@ -7182,6 +7268,8 @@
                   <a:srgbClr val="FFFFFF"/>
                 </a:solidFill>
                 <a:latin typeface="맑은 고딕"/>
+                <a:ea typeface="맑은 고딕"/>
+                <a:cs typeface="맑은 고딕"/>
               </a:rPr>
               <a:t>4</a:t>
             </a:r>
@@ -7265,6 +7353,8 @@
                   <a:srgbClr val="14213D"/>
                 </a:solidFill>
                 <a:latin typeface="맑은 고딕"/>
+                <a:ea typeface="맑은 고딕"/>
+                <a:cs typeface="맑은 고딕"/>
               </a:rPr>
               <a:t>결과 제출</a:t>
             </a:r>
@@ -7304,6 +7394,8 @@
                   <a:srgbClr val="222733"/>
                 </a:solidFill>
                 <a:latin typeface="맑은 고딕"/>
+                <a:ea typeface="맑은 고딕"/>
+                <a:cs typeface="맑은 고딕"/>
               </a:rPr>
               <a:t>체크리스트 제출</a:t>
             </a:r>
@@ -7339,6 +7431,8 @@
                   <a:srgbClr val="5B6373"/>
                 </a:solidFill>
                 <a:latin typeface="맑은 고딕"/>
+                <a:ea typeface="맑은 고딕"/>
+                <a:cs typeface="맑은 고딕"/>
               </a:rPr>
               <a:t>클라우드인프라관리  ·  4주차 2차시</a:t>
             </a:r>
@@ -7374,6 +7468,8 @@
                   <a:srgbClr val="5B6373"/>
                 </a:solidFill>
                 <a:latin typeface="맑은 고딕"/>
+                <a:ea typeface="맑은 고딕"/>
+                <a:cs typeface="맑은 고딕"/>
               </a:rPr>
               <a:t>03 / 12</a:t>
             </a:r>
@@ -7577,6 +7673,8 @@
                   <a:srgbClr val="14213D"/>
                 </a:solidFill>
                 <a:latin typeface="맑은 고딕"/>
+                <a:ea typeface="맑은 고딕"/>
+                <a:cs typeface="맑은 고딕"/>
               </a:rPr>
               <a:t>PART 01</a:t>
             </a:r>
@@ -7612,6 +7710,8 @@
                   <a:srgbClr val="FFFFFF"/>
                 </a:solidFill>
                 <a:latin typeface="맑은 고딕"/>
+                <a:ea typeface="맑은 고딕"/>
+                <a:cs typeface="맑은 고딕"/>
               </a:rPr>
               <a:t>Pod란 무엇인가</a:t>
             </a:r>
@@ -7647,6 +7747,8 @@
                   <a:srgbClr val="C9D3E6"/>
                 </a:solidFill>
                 <a:latin typeface="맑은 고딕"/>
+                <a:ea typeface="맑은 고딕"/>
+                <a:cs typeface="맑은 고딕"/>
               </a:rPr>
               <a:t>K8s가 다루는 가장 작은 단위</a:t>
             </a:r>
@@ -7806,6 +7908,8 @@
                   <a:srgbClr val="14213D"/>
                 </a:solidFill>
                 <a:latin typeface="맑은 고딕"/>
+                <a:ea typeface="맑은 고딕"/>
+                <a:cs typeface="맑은 고딕"/>
               </a:rPr>
               <a:t>01</a:t>
             </a:r>
@@ -7841,6 +7945,8 @@
                   <a:srgbClr val="14B8A6"/>
                 </a:solidFill>
                 <a:latin typeface="맑은 고딕"/>
+                <a:ea typeface="맑은 고딕"/>
+                <a:cs typeface="맑은 고딕"/>
               </a:rPr>
               <a:t>PART 1 · Pod란 무엇인가</a:t>
             </a:r>
@@ -7876,6 +7982,8 @@
                   <a:srgbClr val="FFFFFF"/>
                 </a:solidFill>
                 <a:latin typeface="맑은 고딕"/>
+                <a:ea typeface="맑은 고딕"/>
+                <a:cs typeface="맑은 고딕"/>
               </a:rPr>
               <a:t>Pod = 컨테이너를 감싸는 껍질</a:t>
             </a:r>
@@ -7915,6 +8023,8 @@
                   <a:srgbClr val="0D9488"/>
                 </a:solidFill>
                 <a:latin typeface="맑은 고딕"/>
+                <a:ea typeface="맑은 고딕"/>
+                <a:cs typeface="맑은 고딕"/>
               </a:rPr>
               <a:t>●  </a:t>
             </a:r>
@@ -7924,6 +8034,8 @@
                   <a:srgbClr val="222733"/>
                 </a:solidFill>
                 <a:latin typeface="맑은 고딕"/>
+                <a:ea typeface="맑은 고딕"/>
+                <a:cs typeface="맑은 고딕"/>
               </a:rPr>
               <a:t>K8s는 컨테이너를 직접 다루지 않고, Pod라는 단위로 감싸서 다룸</a:t>
             </a:r>
@@ -7940,6 +8052,8 @@
                   <a:srgbClr val="0D9488"/>
                 </a:solidFill>
                 <a:latin typeface="맑은 고딕"/>
+                <a:ea typeface="맑은 고딕"/>
+                <a:cs typeface="맑은 고딕"/>
               </a:rPr>
               <a:t>●  </a:t>
             </a:r>
@@ -7949,6 +8063,8 @@
                   <a:srgbClr val="222733"/>
                 </a:solidFill>
                 <a:latin typeface="맑은 고딕"/>
+                <a:ea typeface="맑은 고딕"/>
+                <a:cs typeface="맑은 고딕"/>
               </a:rPr>
               <a:t>Pod 안에는 보통 컨테이너 1개, 필요하면 여러 개도 가능</a:t>
             </a:r>
@@ -7965,6 +8081,8 @@
                   <a:srgbClr val="0D9488"/>
                 </a:solidFill>
                 <a:latin typeface="맑은 고딕"/>
+                <a:ea typeface="맑은 고딕"/>
+                <a:cs typeface="맑은 고딕"/>
               </a:rPr>
               <a:t>●  </a:t>
             </a:r>
@@ -7974,6 +8092,8 @@
                   <a:srgbClr val="222733"/>
                 </a:solidFill>
                 <a:latin typeface="맑은 고딕"/>
+                <a:ea typeface="맑은 고딕"/>
+                <a:cs typeface="맑은 고딕"/>
               </a:rPr>
               <a:t>같은 Pod 안 컨테이너들은 네트워크(IP)와 저장공간을 공유</a:t>
             </a:r>
@@ -8053,6 +8173,8 @@
                   <a:srgbClr val="FFFFFF"/>
                 </a:solidFill>
                 <a:latin typeface="맑은 고딕"/>
+                <a:ea typeface="맑은 고딕"/>
+                <a:cs typeface="맑은 고딕"/>
               </a:rPr>
               <a:t>🤔  왜 굳이 한 겹 더 감쌀까</a:t>
             </a:r>
@@ -8088,6 +8210,8 @@
                   <a:srgbClr val="FFFFFF"/>
                 </a:solidFill>
                 <a:latin typeface="맑은 고딕"/>
+                <a:ea typeface="맑은 고딕"/>
+                <a:cs typeface="맑은 고딕"/>
               </a:rPr>
               <a:t>함께 떠야 하는 컨테이너들(예: 앱+로그 수집기)을 하나의 단위로 묶어 관리하기 위해</a:t>
             </a:r>
@@ -8123,6 +8247,8 @@
                   <a:srgbClr val="5B6373"/>
                 </a:solidFill>
                 <a:latin typeface="맑은 고딕"/>
+                <a:ea typeface="맑은 고딕"/>
+                <a:cs typeface="맑은 고딕"/>
               </a:rPr>
               <a:t>클라우드인프라관리  ·  4주차 2차시</a:t>
             </a:r>
@@ -8158,6 +8284,8 @@
                   <a:srgbClr val="5B6373"/>
                 </a:solidFill>
                 <a:latin typeface="맑은 고딕"/>
+                <a:ea typeface="맑은 고딕"/>
+                <a:cs typeface="맑은 고딕"/>
               </a:rPr>
               <a:t>05 / 12</a:t>
             </a:r>
@@ -8361,6 +8489,8 @@
                   <a:srgbClr val="14213D"/>
                 </a:solidFill>
                 <a:latin typeface="맑은 고딕"/>
+                <a:ea typeface="맑은 고딕"/>
+                <a:cs typeface="맑은 고딕"/>
               </a:rPr>
               <a:t>01</a:t>
             </a:r>
@@ -8396,6 +8526,8 @@
                   <a:srgbClr val="14B8A6"/>
                 </a:solidFill>
                 <a:latin typeface="맑은 고딕"/>
+                <a:ea typeface="맑은 고딕"/>
+                <a:cs typeface="맑은 고딕"/>
               </a:rPr>
               <a:t>PART 1 · Pod란 무엇인가</a:t>
             </a:r>
@@ -8431,6 +8563,8 @@
                   <a:srgbClr val="FFFFFF"/>
                 </a:solidFill>
                 <a:latin typeface="맑은 고딕"/>
+                <a:ea typeface="맑은 고딕"/>
+                <a:cs typeface="맑은 고딕"/>
               </a:rPr>
               <a:t>컨테이너 vs Pod</a:t>
             </a:r>
@@ -8510,6 +8644,8 @@
                   <a:srgbClr val="FFFFFF"/>
                 </a:solidFill>
                 <a:latin typeface="맑은 고딕"/>
+                <a:ea typeface="맑은 고딕"/>
+                <a:cs typeface="맑은 고딕"/>
               </a:rPr>
               <a:t>구분</a:t>
             </a:r>
@@ -8589,6 +8725,8 @@
                   <a:srgbClr val="FFFFFF"/>
                 </a:solidFill>
                 <a:latin typeface="맑은 고딕"/>
+                <a:ea typeface="맑은 고딕"/>
+                <a:cs typeface="맑은 고딕"/>
               </a:rPr>
               <a:t>docker run 컨테이너</a:t>
             </a:r>
@@ -8668,6 +8806,8 @@
                   <a:srgbClr val="FFFFFF"/>
                 </a:solidFill>
                 <a:latin typeface="맑은 고딕"/>
+                <a:ea typeface="맑은 고딕"/>
+                <a:cs typeface="맑은 고딕"/>
               </a:rPr>
               <a:t>K8s Pod</a:t>
             </a:r>
@@ -8747,6 +8887,8 @@
                   <a:srgbClr val="14213D"/>
                 </a:solidFill>
                 <a:latin typeface="맑은 고딕"/>
+                <a:ea typeface="맑은 고딕"/>
+                <a:cs typeface="맑은 고딕"/>
               </a:rPr>
               <a:t>관리 주체</a:t>
             </a:r>
@@ -8826,6 +8968,8 @@
                   <a:srgbClr val="222733"/>
                 </a:solidFill>
                 <a:latin typeface="맑은 고딕"/>
+                <a:ea typeface="맑은 고딕"/>
+                <a:cs typeface="맑은 고딕"/>
               </a:rPr>
               <a:t>내가 직접 docker 명령으로</a:t>
             </a:r>
@@ -8905,6 +9049,8 @@
                   <a:srgbClr val="222733"/>
                 </a:solidFill>
                 <a:latin typeface="맑은 고딕"/>
+                <a:ea typeface="맑은 고딕"/>
+                <a:cs typeface="맑은 고딕"/>
               </a:rPr>
               <a:t>K8s가 자동으로 상태 유지</a:t>
             </a:r>
@@ -8984,6 +9130,8 @@
                   <a:srgbClr val="14213D"/>
                 </a:solidFill>
                 <a:latin typeface="맑은 고딕"/>
+                <a:ea typeface="맑은 고딕"/>
+                <a:cs typeface="맑은 고딕"/>
               </a:rPr>
               <a:t>실패 시</a:t>
             </a:r>
@@ -9063,6 +9211,8 @@
                   <a:srgbClr val="222733"/>
                 </a:solidFill>
                 <a:latin typeface="맑은 고딕"/>
+                <a:ea typeface="맑은 고딕"/>
+                <a:cs typeface="맑은 고딕"/>
               </a:rPr>
               <a:t>누군가 직접 재실행</a:t>
             </a:r>
@@ -9142,6 +9292,8 @@
                   <a:srgbClr val="222733"/>
                 </a:solidFill>
                 <a:latin typeface="맑은 고딕"/>
+                <a:ea typeface="맑은 고딕"/>
+                <a:cs typeface="맑은 고딕"/>
               </a:rPr>
               <a:t>K8s가 자동으로 재생성</a:t>
             </a:r>
@@ -9221,6 +9373,8 @@
                   <a:srgbClr val="14213D"/>
                 </a:solidFill>
                 <a:latin typeface="맑은 고딕"/>
+                <a:ea typeface="맑은 고딕"/>
+                <a:cs typeface="맑은 고딕"/>
               </a:rPr>
               <a:t>배포 단위</a:t>
             </a:r>
@@ -9300,6 +9454,8 @@
                   <a:srgbClr val="222733"/>
                 </a:solidFill>
                 <a:latin typeface="맑은 고딕"/>
+                <a:ea typeface="맑은 고딕"/>
+                <a:cs typeface="맑은 고딕"/>
               </a:rPr>
               <a:t>컨테이너 1개</a:t>
             </a:r>
@@ -9379,6 +9535,8 @@
                   <a:srgbClr val="222733"/>
                 </a:solidFill>
                 <a:latin typeface="맑은 고딕"/>
+                <a:ea typeface="맑은 고딕"/>
+                <a:cs typeface="맑은 고딕"/>
               </a:rPr>
               <a:t>컨테이너 1개 이상을 묶은 Pod</a:t>
             </a:r>
@@ -9414,6 +9572,8 @@
                   <a:srgbClr val="5B6373"/>
                 </a:solidFill>
                 <a:latin typeface="맑은 고딕"/>
+                <a:ea typeface="맑은 고딕"/>
+                <a:cs typeface="맑은 고딕"/>
               </a:rPr>
               <a:t>클라우드인프라관리  ·  4주차 2차시</a:t>
             </a:r>
@@ -9449,6 +9609,8 @@
                   <a:srgbClr val="5B6373"/>
                 </a:solidFill>
                 <a:latin typeface="맑은 고딕"/>
+                <a:ea typeface="맑은 고딕"/>
+                <a:cs typeface="맑은 고딕"/>
               </a:rPr>
               <a:t>06 / 12</a:t>
             </a:r>
@@ -9652,6 +9814,8 @@
                   <a:srgbClr val="14213D"/>
                 </a:solidFill>
                 <a:latin typeface="맑은 고딕"/>
+                <a:ea typeface="맑은 고딕"/>
+                <a:cs typeface="맑은 고딕"/>
               </a:rPr>
               <a:t>PART 02</a:t>
             </a:r>
@@ -9687,6 +9851,8 @@
                   <a:srgbClr val="FFFFFF"/>
                 </a:solidFill>
                 <a:latin typeface="맑은 고딕"/>
+                <a:ea typeface="맑은 고딕"/>
+                <a:cs typeface="맑은 고딕"/>
               </a:rPr>
               <a:t>kubectl로 Pod 다루기</a:t>
             </a:r>
@@ -9722,6 +9888,8 @@
                   <a:srgbClr val="C9D3E6"/>
                 </a:solidFill>
                 <a:latin typeface="맑은 고딕"/>
+                <a:ea typeface="맑은 고딕"/>
+                <a:cs typeface="맑은 고딕"/>
               </a:rPr>
               <a:t>run · get · describe · logs</a:t>
             </a:r>
@@ -9881,6 +10049,8 @@
                   <a:srgbClr val="14213D"/>
                 </a:solidFill>
                 <a:latin typeface="맑은 고딕"/>
+                <a:ea typeface="맑은 고딕"/>
+                <a:cs typeface="맑은 고딕"/>
               </a:rPr>
               <a:t>02</a:t>
             </a:r>
@@ -9916,6 +10086,8 @@
                   <a:srgbClr val="14B8A6"/>
                 </a:solidFill>
                 <a:latin typeface="맑은 고딕"/>
+                <a:ea typeface="맑은 고딕"/>
+                <a:cs typeface="맑은 고딕"/>
               </a:rPr>
               <a:t>PART 2 · kubectl로 Pod 다루기</a:t>
             </a:r>
@@ -9951,6 +10123,8 @@
                   <a:srgbClr val="FFFFFF"/>
                 </a:solidFill>
                 <a:latin typeface="맑은 고딕"/>
+                <a:ea typeface="맑은 고딕"/>
+                <a:cs typeface="맑은 고딕"/>
               </a:rPr>
               <a:t>Pod 기본 명령어</a:t>
             </a:r>
@@ -9990,6 +10164,8 @@
                   <a:srgbClr val="0D9488"/>
                 </a:solidFill>
                 <a:latin typeface="맑은 고딕"/>
+                <a:ea typeface="맑은 고딕"/>
+                <a:cs typeface="맑은 고딕"/>
               </a:rPr>
               <a:t>●  </a:t>
             </a:r>
@@ -9999,6 +10175,8 @@
                   <a:srgbClr val="222733"/>
                 </a:solidFill>
                 <a:latin typeface="맑은 고딕"/>
+                <a:ea typeface="맑은 고딕"/>
+                <a:cs typeface="맑은 고딕"/>
               </a:rPr>
               <a:t>kubectl run {이름} --image={이미지}  — Pod 하나를 즉석에서 실행</a:t>
             </a:r>
@@ -10015,6 +10193,8 @@
                   <a:srgbClr val="0D9488"/>
                 </a:solidFill>
                 <a:latin typeface="맑은 고딕"/>
+                <a:ea typeface="맑은 고딕"/>
+                <a:cs typeface="맑은 고딕"/>
               </a:rPr>
               <a:t>●  </a:t>
             </a:r>
@@ -10024,6 +10204,8 @@
                   <a:srgbClr val="222733"/>
                 </a:solidFill>
                 <a:latin typeface="맑은 고딕"/>
+                <a:ea typeface="맑은 고딕"/>
+                <a:cs typeface="맑은 고딕"/>
               </a:rPr>
               <a:t>kubectl get pods  — 현재 떠 있는 Pod 목록 확인</a:t>
             </a:r>
@@ -10040,6 +10222,8 @@
                   <a:srgbClr val="0D9488"/>
                 </a:solidFill>
                 <a:latin typeface="맑은 고딕"/>
+                <a:ea typeface="맑은 고딕"/>
+                <a:cs typeface="맑은 고딕"/>
               </a:rPr>
               <a:t>●  </a:t>
             </a:r>
@@ -10049,6 +10233,8 @@
                   <a:srgbClr val="222733"/>
                 </a:solidFill>
                 <a:latin typeface="맑은 고딕"/>
+                <a:ea typeface="맑은 고딕"/>
+                <a:cs typeface="맑은 고딕"/>
               </a:rPr>
               <a:t>kubectl describe pod {이름}  — 그 Pod의 상세 상태·이벤트 확인</a:t>
             </a:r>
@@ -10065,6 +10251,8 @@
                   <a:srgbClr val="0D9488"/>
                 </a:solidFill>
                 <a:latin typeface="맑은 고딕"/>
+                <a:ea typeface="맑은 고딕"/>
+                <a:cs typeface="맑은 고딕"/>
               </a:rPr>
               <a:t>●  </a:t>
             </a:r>
@@ -10074,6 +10262,8 @@
                   <a:srgbClr val="222733"/>
                 </a:solidFill>
                 <a:latin typeface="맑은 고딕"/>
+                <a:ea typeface="맑은 고딕"/>
+                <a:cs typeface="맑은 고딕"/>
               </a:rPr>
               <a:t>kubectl logs {이름}  — Pod(컨테이너) 로그 확인</a:t>
             </a:r>
@@ -10090,6 +10280,8 @@
                   <a:srgbClr val="0D9488"/>
                 </a:solidFill>
                 <a:latin typeface="맑은 고딕"/>
+                <a:ea typeface="맑은 고딕"/>
+                <a:cs typeface="맑은 고딕"/>
               </a:rPr>
               <a:t>●  </a:t>
             </a:r>
@@ -10099,6 +10291,8 @@
                   <a:srgbClr val="222733"/>
                 </a:solidFill>
                 <a:latin typeface="맑은 고딕"/>
+                <a:ea typeface="맑은 고딕"/>
+                <a:cs typeface="맑은 고딕"/>
               </a:rPr>
               <a:t>kubectl delete pod {이름}  — Pod 삭제</a:t>
             </a:r>
@@ -10134,6 +10328,8 @@
                   <a:srgbClr val="5B6373"/>
                 </a:solidFill>
                 <a:latin typeface="맑은 고딕"/>
+                <a:ea typeface="맑은 고딕"/>
+                <a:cs typeface="맑은 고딕"/>
               </a:rPr>
               <a:t>클라우드인프라관리  ·  4주차 2차시</a:t>
             </a:r>
@@ -10169,6 +10365,8 @@
                   <a:srgbClr val="5B6373"/>
                 </a:solidFill>
                 <a:latin typeface="맑은 고딕"/>
+                <a:ea typeface="맑은 고딕"/>
+                <a:cs typeface="맑은 고딕"/>
               </a:rPr>
               <a:t>08 / 12</a:t>
             </a:r>
@@ -10372,6 +10570,8 @@
                   <a:srgbClr val="14213D"/>
                 </a:solidFill>
                 <a:latin typeface="맑은 고딕"/>
+                <a:ea typeface="맑은 고딕"/>
+                <a:cs typeface="맑은 고딕"/>
               </a:rPr>
               <a:t>03</a:t>
             </a:r>
@@ -10407,6 +10607,8 @@
                   <a:srgbClr val="14B8A6"/>
                 </a:solidFill>
                 <a:latin typeface="맑은 고딕"/>
+                <a:ea typeface="맑은 고딕"/>
+                <a:cs typeface="맑은 고딕"/>
               </a:rPr>
               <a:t>실습 안내</a:t>
             </a:r>
@@ -10442,6 +10644,8 @@
                   <a:srgbClr val="FFFFFF"/>
                 </a:solidFill>
                 <a:latin typeface="맑은 고딕"/>
+                <a:ea typeface="맑은 고딕"/>
+                <a:cs typeface="맑은 고딕"/>
               </a:rPr>
               <a:t>Killercoda — Pod 선언 실행</a:t>
             </a:r>
@@ -10481,6 +10685,8 @@
                   <a:srgbClr val="0D9488"/>
                 </a:solidFill>
                 <a:latin typeface="맑은 고딕"/>
+                <a:ea typeface="맑은 고딕"/>
+                <a:cs typeface="맑은 고딕"/>
               </a:rPr>
               <a:t>●  </a:t>
             </a:r>
@@ -10490,6 +10696,8 @@
                   <a:srgbClr val="222733"/>
                 </a:solidFill>
                 <a:latin typeface="맑은 고딕"/>
+                <a:ea typeface="맑은 고딕"/>
+                <a:cs typeface="맑은 고딕"/>
               </a:rPr>
               <a:t>미리 구동된 멀티노드 K8s 클러스터 접속</a:t>
             </a:r>
@@ -10506,6 +10714,8 @@
                   <a:srgbClr val="0D9488"/>
                 </a:solidFill>
                 <a:latin typeface="맑은 고딕"/>
+                <a:ea typeface="맑은 고딕"/>
+                <a:cs typeface="맑은 고딕"/>
               </a:rPr>
               <a:t>●  </a:t>
             </a:r>
@@ -10515,6 +10725,8 @@
                   <a:srgbClr val="222733"/>
                 </a:solidFill>
                 <a:latin typeface="맑은 고딕"/>
+                <a:ea typeface="맑은 고딕"/>
+                <a:cs typeface="맑은 고딕"/>
               </a:rPr>
               <a:t>kubectl run mypod --image=nginx</a:t>
             </a:r>
@@ -10531,6 +10743,8 @@
                   <a:srgbClr val="0D9488"/>
                 </a:solidFill>
                 <a:latin typeface="맑은 고딕"/>
+                <a:ea typeface="맑은 고딕"/>
+                <a:cs typeface="맑은 고딕"/>
               </a:rPr>
               <a:t>●  </a:t>
             </a:r>
@@ -10540,6 +10754,8 @@
                   <a:srgbClr val="222733"/>
                 </a:solidFill>
                 <a:latin typeface="맑은 고딕"/>
+                <a:ea typeface="맑은 고딕"/>
+                <a:cs typeface="맑은 고딕"/>
               </a:rPr>
               <a:t>kubectl get pods  — Running 상태 확인</a:t>
             </a:r>
@@ -10556,6 +10772,8 @@
                   <a:srgbClr val="0D9488"/>
                 </a:solidFill>
                 <a:latin typeface="맑은 고딕"/>
+                <a:ea typeface="맑은 고딕"/>
+                <a:cs typeface="맑은 고딕"/>
               </a:rPr>
               <a:t>●  </a:t>
             </a:r>
@@ -10565,6 +10783,8 @@
                   <a:srgbClr val="222733"/>
                 </a:solidFill>
                 <a:latin typeface="맑은 고딕"/>
+                <a:ea typeface="맑은 고딕"/>
+                <a:cs typeface="맑은 고딕"/>
               </a:rPr>
               <a:t>kubectl describe pod mypod  — 어느 노드에 배치됐는지 확인</a:t>
             </a:r>
@@ -10600,6 +10820,8 @@
                   <a:srgbClr val="5B6373"/>
                 </a:solidFill>
                 <a:latin typeface="맑은 고딕"/>
+                <a:ea typeface="맑은 고딕"/>
+                <a:cs typeface="맑은 고딕"/>
               </a:rPr>
               <a:t>클라우드인프라관리  ·  4주차 2차시</a:t>
             </a:r>
@@ -10635,6 +10857,8 @@
                   <a:srgbClr val="5B6373"/>
                 </a:solidFill>
                 <a:latin typeface="맑은 고딕"/>
+                <a:ea typeface="맑은 고딕"/>
+                <a:cs typeface="맑은 고딕"/>
               </a:rPr>
               <a:t>09 / 12</a:t>
             </a:r>
